--- a/examples/repositories/hand-drawn-showcase/deck.pptx
+++ b/examples/repositories/hand-drawn-showcase/deck.pptx
@@ -506,7 +506,7 @@
           <a:p>
             <a:r>
               <a:rPr lang="en-US" dirty="0"/>
-              <a:t>章扉だけの作例です。ここから先の活動内容はチームで組み立てます。</a:t>
+              <a:t>表紙。原典Step5に沿い、章ラベルや大きな図を置かず、小さな装飾マークだけを添える。 日本語グリフだけYu Minchoを明示する派生。欧文Georgia/Calibri、原典の字号・位置は保持。</a:t>
             </a:r>
             <a:endParaRPr lang="en-US" dirty="0"/>
           </a:p>
@@ -594,7 +594,7 @@
           <a:p>
             <a:r>
               <a:rPr lang="en-US" dirty="0"/>
-              <a:t>小さな違和感やよかった場面を探す章。虫眼鏡は観察の入口を示します。</a:t>
+              <a:t>観察した場面を集める章。原典#1の虫眼鏡を対応させた。章扉なので本文の手順や集計は含まない。 日本語グリフだけYu Minchoを明示する派生。欧文Georgia/Calibri、原典の字号・位置は保持。</a:t>
             </a:r>
             <a:endParaRPr lang="en-US" dirty="0"/>
           </a:p>
@@ -682,7 +682,7 @@
           <a:p>
             <a:r>
               <a:rPr lang="en-US" dirty="0"/>
-              <a:t>考えを話し、違う見方を聴く章。原典の吹き出しで対話を示します。</a:t>
+              <a:t>集めた気づきについて意見を共有する章。原典#2の吹き出しを対応させた。 日本語グリフだけYu Minchoを明示する派生。欧文Georgia/Calibri、原典の字号・位置は保持。</a:t>
             </a:r>
             <a:endParaRPr lang="en-US" dirty="0"/>
           </a:p>
@@ -770,7 +770,7 @@
           <a:p>
             <a:r>
               <a:rPr lang="en-US" dirty="0"/>
-              <a:t>小さな試作へ進む章。階段は一歩ずつ進める試行を示します。</a:t>
+              <a:t>一度に大きく変えず、試行を進める章。原典#20の階段を対応させた。 日本語グリフだけYu Minchoを明示する派生。欧文Georgia/Calibri、原典の字号・位置は保持。</a:t>
             </a:r>
             <a:endParaRPr lang="en-US" dirty="0"/>
           </a:p>
@@ -858,7 +858,7 @@
           <a:p>
             <a:r>
               <a:rPr lang="en-US" dirty="0"/>
-              <a:t>試して気づいたことを持ち帰る章。循環矢印は次の試行へつなぐ学びを示します。</a:t>
+              <a:t>試した結果を記録する章。原典#23のチェックリストを対応させた。旧版の循環矢印は使用しない。 日本語グリフだけYu Minchoを明示する派生。欧文Georgia/Calibri、原典の字号・位置は保持。</a:t>
             </a:r>
             <a:endParaRPr lang="en-US" dirty="0"/>
           </a:p>
@@ -1208,1395 +1208,846 @@
 </file>
 
 <file path=ppt/slides/slide1.xml><?xml version="1.0" encoding="utf-8"?>
-<p:sld xmlns:a="http://schemas.openxmlformats.org/drawingml/2006/main" xmlns:r="http://schemas.openxmlformats.org/officeDocument/2006/relationships" xmlns:p="http://schemas.openxmlformats.org/presentationml/2006/main">
-  <p:cSld name="Slide 1">
-    <p:bg>
-      <p:bgPr>
-        <a:solidFill>
-          <a:srgbClr val="F4EADC"/>
-        </a:solidFill>
-      </p:bgPr>
-    </p:bg>
-    <p:spTree>
-      <p:nvGrpSpPr>
-        <p:cNvPr id="1" name=""/>
-        <p:cNvGrpSpPr/>
-        <p:nvPr/>
-      </p:nvGrpSpPr>
-      <p:grpSpPr>
-        <a:xfrm>
-          <a:off x="0" y="0"/>
-          <a:ext cx="0" cy="0"/>
-          <a:chOff x="0" y="0"/>
-          <a:chExt cx="0" cy="0"/>
-        </a:xfrm>
-      </p:grpSpPr>
-      <p:pic>
-        <p:nvPicPr>
-          <p:cNvPr id="2" name="Image 0" descr="preencoded.png">    </p:cNvPr>
-          <p:cNvPicPr>
-            <a:picLocks noChangeAspect="1"/>
-          </p:cNvPicPr>
-          <p:nvPr/>
-        </p:nvPicPr>
-        <p:blipFill>
-          <a:blip r:embed="rId1"/>
-          <a:stretch>
-            <a:fillRect/>
-          </a:stretch>
-        </p:blipFill>
-        <p:spPr>
-          <a:xfrm>
-            <a:off x="228600" y="182880"/>
-            <a:ext cx="11722608" cy="6181344"/>
-          </a:xfrm>
-          <a:prstGeom prst="rect">
-            <a:avLst/>
-          </a:prstGeom>
-        </p:spPr>
-      </p:pic>
-      <p:pic>
-        <p:nvPicPr>
-          <p:cNvPr id="3" name="Image 1" descr="preencoded.png">    </p:cNvPr>
-          <p:cNvPicPr>
-            <a:picLocks noChangeAspect="1"/>
-          </p:cNvPicPr>
-          <p:nvPr/>
-        </p:nvPicPr>
-        <p:blipFill>
-          <a:blip r:embed="rId2"/>
-          <a:stretch>
-            <a:fillRect/>
-          </a:stretch>
-        </p:blipFill>
-        <p:spPr>
-          <a:xfrm>
-            <a:off x="6400800" y="594360"/>
-            <a:ext cx="5029200" cy="4480560"/>
-          </a:xfrm>
-          <a:prstGeom prst="rect">
-            <a:avLst/>
-          </a:prstGeom>
-        </p:spPr>
-      </p:pic>
-      <p:sp>
-        <p:nvSpPr>
-          <p:cNvPr id="4" name="Text 0"/>
-          <p:cNvSpPr/>
-          <p:nvPr/>
-        </p:nvSpPr>
-        <p:spPr>
-          <a:xfrm>
-            <a:off x="822960" y="685800"/>
-            <a:ext cx="5943600" cy="320040"/>
-          </a:xfrm>
-          <a:prstGeom prst="rect">
-            <a:avLst/>
-          </a:prstGeom>
-          <a:noFill/>
-          <a:ln/>
-        </p:spPr>
-        <p:txBody>
-          <a:bodyPr wrap="square" lIns="0" tIns="0" rIns="0" bIns="0" rtlCol="0" anchor="ctr"/>
-          <a:lstStyle/>
-          <a:p>
-            <a:pPr indent="0" marL="0">
-              <a:buNone/>
-            </a:pPr>
-            <a:r>
-              <a:rPr lang="en-US" sz="1400" spc="200" kern="0" dirty="0">
-                <a:solidFill>
-                  <a:srgbClr val="141413"/>
-                </a:solidFill>
-                <a:latin typeface="Manrope" pitchFamily="34" charset="0"/>
-                <a:ea typeface="Manrope" pitchFamily="34" charset="-122"/>
-                <a:cs typeface="Manrope" pitchFamily="34" charset="-120"/>
-              </a:rPr>
-              <a:t>IDEAS / GROW TOGETHER</a:t>
-            </a:r>
-            <a:endParaRPr lang="en-US" sz="1400" dirty="0"/>
-          </a:p>
-        </p:txBody>
-      </p:sp>
-      <p:sp>
-        <p:nvSpPr>
-          <p:cNvPr id="5" name="Text 1"/>
-          <p:cNvSpPr/>
-          <p:nvPr/>
-        </p:nvSpPr>
-        <p:spPr>
-          <a:xfrm>
-            <a:off x="804672" y="1828800"/>
-            <a:ext cx="6400800" cy="1965960"/>
-          </a:xfrm>
-          <a:prstGeom prst="rect">
-            <a:avLst/>
-          </a:prstGeom>
-          <a:noFill/>
-          <a:ln/>
-        </p:spPr>
-        <p:txBody>
-          <a:bodyPr wrap="square" lIns="0" tIns="0" rIns="0" bIns="0" rtlCol="0" anchor="ctr"/>
-          <a:lstStyle/>
-          <a:p>
-            <a:pPr indent="0" marL="0">
-              <a:buNone/>
-            </a:pPr>
-            <a:r>
-              <a:rPr lang="en-US" sz="4200" dirty="0">
-                <a:solidFill>
-                  <a:srgbClr val="141413"/>
-                </a:solidFill>
-                <a:latin typeface="Dela Gothic One" pitchFamily="34" charset="0"/>
-                <a:ea typeface="Dela Gothic One" pitchFamily="34" charset="-122"/>
-                <a:cs typeface="Dela Gothic One" pitchFamily="34" charset="-120"/>
-              </a:rPr>
-              <a:t>チームのアイデアを、</a:t>
-            </a:r>
-            <a:endParaRPr lang="en-US" sz="4200" dirty="0"/>
-          </a:p>
-          <a:p>
-            <a:pPr indent="0" marL="0">
-              <a:buNone/>
-            </a:pPr>
-            <a:r>
-              <a:rPr lang="en-US" sz="4200" dirty="0">
-                <a:solidFill>
-                  <a:srgbClr val="141413"/>
-                </a:solidFill>
-                <a:latin typeface="Dela Gothic One" pitchFamily="34" charset="0"/>
-                <a:ea typeface="Dela Gothic One" pitchFamily="34" charset="-122"/>
-                <a:cs typeface="Dela Gothic One" pitchFamily="34" charset="-120"/>
-              </a:rPr>
-              <a:t>育てる。</a:t>
-            </a:r>
-            <a:endParaRPr lang="en-US" sz="4200" dirty="0"/>
-          </a:p>
-        </p:txBody>
-      </p:sp>
-      <p:sp>
-        <p:nvSpPr>
-          <p:cNvPr id="6" name="Text 2"/>
-          <p:cNvSpPr/>
-          <p:nvPr/>
-        </p:nvSpPr>
-        <p:spPr>
-          <a:xfrm>
-            <a:off x="868680" y="5166360"/>
-            <a:ext cx="8686800" cy="457200"/>
-          </a:xfrm>
-          <a:prstGeom prst="rect">
-            <a:avLst/>
-          </a:prstGeom>
-          <a:noFill/>
-          <a:ln/>
-        </p:spPr>
-        <p:txBody>
-          <a:bodyPr wrap="square" lIns="0" tIns="0" rIns="0" bIns="0" rtlCol="0" anchor="ctr"/>
-          <a:lstStyle/>
-          <a:p>
-            <a:pPr indent="0" marL="0">
-              <a:buNone/>
-            </a:pPr>
-            <a:r>
-              <a:rPr lang="en-US" sz="2000" dirty="0">
-                <a:solidFill>
-                  <a:srgbClr val="141413"/>
-                </a:solidFill>
-                <a:latin typeface="Zen Maru Gothic" pitchFamily="34" charset="0"/>
-                <a:ea typeface="Zen Maru Gothic" pitchFamily="34" charset="-122"/>
-                <a:cs typeface="Zen Maru Gothic" pitchFamily="34" charset="-120"/>
-              </a:rPr>
-              <a:t>ひとつの気づきから、次の一歩へ。</a:t>
-            </a:r>
-            <a:endParaRPr lang="en-US" sz="2000" dirty="0"/>
-          </a:p>
-        </p:txBody>
-      </p:sp>
-      <p:sp>
-        <p:nvSpPr>
-          <p:cNvPr id="7" name="Text 3"/>
-          <p:cNvSpPr/>
-          <p:nvPr/>
-        </p:nvSpPr>
-        <p:spPr>
-          <a:xfrm>
-            <a:off x="10972800" y="6400800"/>
-            <a:ext cx="594360" cy="228600"/>
-          </a:xfrm>
-          <a:prstGeom prst="rect">
-            <a:avLst/>
-          </a:prstGeom>
-          <a:noFill/>
-          <a:ln/>
-        </p:spPr>
-        <p:txBody>
-          <a:bodyPr wrap="square" lIns="0" tIns="0" rIns="0" bIns="0" rtlCol="0" anchor="b"/>
-          <a:lstStyle/>
-          <a:p>
-            <a:pPr algn="r" indent="0" marL="0">
-              <a:buNone/>
-            </a:pPr>
-            <a:r>
-              <a:rPr lang="en-US" sz="1400" dirty="0">
-                <a:solidFill>
-                  <a:srgbClr val="141413"/>
-                </a:solidFill>
-                <a:latin typeface="Manrope" pitchFamily="34" charset="0"/>
-                <a:ea typeface="Manrope" pitchFamily="34" charset="-122"/>
-                <a:cs typeface="Manrope" pitchFamily="34" charset="-120"/>
-              </a:rPr>
-              <a:t>01</a:t>
-            </a:r>
-            <a:endParaRPr lang="en-US" sz="1400" dirty="0"/>
-          </a:p>
-        </p:txBody>
-      </p:sp>
-      <p:sp>
-        <p:nvSpPr>
-          <p:cNvPr id="8" name="Text 4"/>
-          <p:cNvSpPr/>
-          <p:nvPr/>
-        </p:nvSpPr>
-        <p:spPr>
-          <a:xfrm>
-            <a:off x="731520" y="6428232"/>
-            <a:ext cx="9601200" cy="201168"/>
-          </a:xfrm>
-          <a:prstGeom prst="rect">
-            <a:avLst/>
-          </a:prstGeom>
-          <a:noFill/>
-          <a:ln/>
-        </p:spPr>
-        <p:txBody>
-          <a:bodyPr wrap="square" lIns="0" tIns="0" rIns="0" bIns="0" rtlCol="0" anchor="ctr"/>
-          <a:lstStyle/>
-          <a:p>
-            <a:pPr indent="0" marL="0">
-              <a:buNone/>
-            </a:pPr>
-            <a:r>
-              <a:rPr lang="en-US" sz="900" dirty="0">
-                <a:solidFill>
-                  <a:srgbClr val="645D53"/>
-                </a:solidFill>
-                <a:latin typeface="Zen Maru Gothic" pitchFamily="34" charset="0"/>
-                <a:ea typeface="Zen Maru Gothic" pitchFamily="34" charset="-122"/>
-                <a:cs typeface="Zen Maru Gothic" pitchFamily="34" charset="-120"/>
-              </a:rPr>
-              <a:t>架空のチームワークショップ / 章扉の作例</a:t>
-            </a:r>
-            <a:endParaRPr lang="en-US" sz="900" dirty="0"/>
-          </a:p>
-        </p:txBody>
-      </p:sp>
-    </p:spTree>
-  </p:cSld>
-  <p:clrMapOvr>
-    <a:masterClrMapping/>
-  </p:clrMapOvr>
-</p:sld>
+<ns0:sld xmlns:ns0="http://schemas.openxmlformats.org/presentationml/2006/main" xmlns:ns1="http://schemas.openxmlformats.org/drawingml/2006/main" xmlns:ns2="http://schemas.openxmlformats.org/officeDocument/2006/relationships">
+  <ns0:cSld name="Slide 1">
+    <ns0:bg>
+      <ns0:bgPr>
+        <ns1:solidFill>
+          <ns1:srgbClr val="E2DACC"/>
+        </ns1:solidFill>
+      </ns0:bgPr>
+    </ns0:bg>
+    <ns0:spTree>
+      <ns0:nvGrpSpPr>
+        <ns0:cNvPr id="1" name=""/>
+        <ns0:cNvGrpSpPr/>
+        <ns0:nvPr/>
+      </ns0:nvGrpSpPr>
+      <ns0:grpSpPr>
+        <ns1:xfrm>
+          <ns1:off x="0" y="0"/>
+          <ns1:ext cx="0" cy="0"/>
+          <ns1:chOff x="0" y="0"/>
+          <ns1:chExt cx="0" cy="0"/>
+        </ns1:xfrm>
+      </ns0:grpSpPr>
+      <ns0:pic>
+        <ns0:nvPicPr>
+          <ns0:cNvPr id="2" name="Image 0" descr="preencoded.png">    </ns0:cNvPr>
+          <ns0:cNvPicPr>
+            <ns1:picLocks noChangeAspect="1"/>
+          </ns0:cNvPicPr>
+          <ns0:nvPr/>
+        </ns0:nvPicPr>
+        <ns0:blipFill>
+          <ns1:blip ns2:embed="rId1"/>
+          <ns1:stretch>
+            <ns1:fillRect/>
+          </ns1:stretch>
+        </ns0:blipFill>
+        <ns0:spPr>
+          <ns1:xfrm>
+            <ns1:off x="9784080" y="1005840"/>
+            <ns1:ext cx="822960" cy="685800"/>
+          </ns1:xfrm>
+          <ns1:prstGeom prst="rect">
+            <ns1:avLst/>
+          </ns1:prstGeom>
+        </ns0:spPr>
+      </ns0:pic>
+      <ns0:sp>
+        <ns0:nvSpPr>
+          <ns0:cNvPr id="3" name="Text 0"/>
+          <ns0:cNvSpPr/>
+          <ns0:nvPr/>
+        </ns0:nvSpPr>
+        <ns0:spPr>
+          <ns1:xfrm>
+            <ns1:off x="914400" y="1645920"/>
+            <ns1:ext cx="8229600" cy="1920240"/>
+          </ns1:xfrm>
+          <ns1:prstGeom prst="rect">
+            <ns1:avLst/>
+          </ns1:prstGeom>
+          <ns1:noFill/>
+          <ns1:ln/>
+        </ns0:spPr>
+        <ns0:txBody>
+          <ns1:bodyPr wrap="square" lIns="0" tIns="0" rIns="0" bIns="0" rtlCol="0" anchor="t"/>
+          <ns1:lstStyle/>
+          <ns1:p>
+            <ns1:pPr indent="0" marL="0">
+              <ns1:buNone/>
+            </ns1:pPr>
+            <ns1:r>
+              <ns1:rPr lang="en-US" sz="5400" dirty="0">
+                <ns1:solidFill>
+                  <ns1:srgbClr val="141413"/>
+                </ns1:solidFill>
+                <ns1:latin typeface="Georgia" pitchFamily="34" charset="0"/>
+                <ns1:ea typeface="Yu Mincho" pitchFamily="34" charset="-122"/>
+                <ns1:cs typeface="Georgia" pitchFamily="34" charset="-120"/>
+              </ns1:rPr>
+              <ns1:t>話し合いの</ns1:t>
+            </ns1:r>
+            <ns1:endParaRPr lang="en-US" sz="5400" dirty="0"/>
+          </ns1:p>
+          <ns1:p>
+            <ns1:pPr indent="0" marL="0">
+              <ns1:buNone/>
+            </ns1:pPr>
+            <ns1:r>
+              <ns1:rPr lang="en-US" sz="5400" dirty="0">
+                <ns1:solidFill>
+                  <ns1:srgbClr val="141413"/>
+                </ns1:solidFill>
+                <ns1:latin typeface="Georgia" pitchFamily="34" charset="0"/>
+                <ns1:ea typeface="Yu Mincho" pitchFamily="34" charset="-122"/>
+                <ns1:cs typeface="Georgia" pitchFamily="34" charset="-120"/>
+              </ns1:rPr>
+              <ns1:t>進め方</ns1:t>
+            </ns1:r>
+            <ns1:endParaRPr lang="en-US" sz="5400" dirty="0"/>
+          </ns1:p>
+        </ns0:txBody>
+      </ns0:sp>
+      <ns0:sp>
+        <ns0:nvSpPr>
+          <ns0:cNvPr id="4" name="Text 1"/>
+          <ns0:cNvSpPr/>
+          <ns0:nvPr/>
+        </ns0:nvSpPr>
+        <ns0:spPr>
+          <ns1:xfrm>
+            <ns1:off x="11247120" y="6400800"/>
+            <ns1:ext cx="457200" cy="228600"/>
+          </ns1:xfrm>
+          <ns1:prstGeom prst="rect">
+            <ns1:avLst/>
+          </ns1:prstGeom>
+          <ns1:noFill/>
+          <ns1:ln/>
+        </ns0:spPr>
+        <ns0:txBody>
+          <ns1:bodyPr wrap="square" lIns="0" tIns="0" rIns="0" bIns="0" rtlCol="0" anchor="b"/>
+          <ns1:lstStyle/>
+          <ns1:p>
+            <ns1:pPr algn="r" indent="0" marL="0">
+              <ns1:buNone/>
+            </ns1:pPr>
+            <ns1:r>
+              <ns1:rPr lang="en-US" sz="1400" dirty="0">
+                <ns1:solidFill>
+                  <ns1:srgbClr val="141413"/>
+                </ns1:solidFill>
+                <ns1:latin typeface="Calibri" pitchFamily="34" charset="0"/>
+                <ns1:ea typeface="Calibri" pitchFamily="34" charset="-122"/>
+                <ns1:cs typeface="Calibri" pitchFamily="34" charset="-120"/>
+              </ns1:rPr>
+              <ns1:t>1</ns1:t>
+            </ns1:r>
+            <ns1:endParaRPr lang="en-US" sz="1400" dirty="0"/>
+          </ns1:p>
+        </ns0:txBody>
+      </ns0:sp>
+    </ns0:spTree>
+  </ns0:cSld>
+  <ns0:clrMapOvr>
+    <ns1:masterClrMapping/>
+  </ns0:clrMapOvr>
+</ns0:sld>
 </file>
 
 <file path=ppt/slides/slide2.xml><?xml version="1.0" encoding="utf-8"?>
-<p:sld xmlns:a="http://schemas.openxmlformats.org/drawingml/2006/main" xmlns:r="http://schemas.openxmlformats.org/officeDocument/2006/relationships" xmlns:p="http://schemas.openxmlformats.org/presentationml/2006/main">
-  <p:cSld name="Slide 2">
-    <p:bg>
-      <p:bgPr>
-        <a:solidFill>
-          <a:srgbClr val="EEE0D0"/>
-        </a:solidFill>
-      </p:bgPr>
-    </p:bg>
-    <p:spTree>
-      <p:nvGrpSpPr>
-        <p:cNvPr id="1" name=""/>
-        <p:cNvGrpSpPr/>
-        <p:nvPr/>
-      </p:nvGrpSpPr>
-      <p:grpSpPr>
-        <a:xfrm>
-          <a:off x="0" y="0"/>
-          <a:ext cx="0" cy="0"/>
-          <a:chOff x="0" y="0"/>
-          <a:chExt cx="0" cy="0"/>
-        </a:xfrm>
-      </p:grpSpPr>
-      <p:pic>
-        <p:nvPicPr>
-          <p:cNvPr id="2" name="Image 0" descr="preencoded.png">    </p:cNvPr>
-          <p:cNvPicPr>
-            <a:picLocks noChangeAspect="1"/>
-          </p:cNvPicPr>
-          <p:nvPr/>
-        </p:nvPicPr>
-        <p:blipFill>
-          <a:blip r:embed="rId1"/>
-          <a:stretch>
-            <a:fillRect/>
-          </a:stretch>
-        </p:blipFill>
-        <p:spPr>
-          <a:xfrm>
-            <a:off x="228600" y="182880"/>
-            <a:ext cx="11722608" cy="6181344"/>
-          </a:xfrm>
-          <a:prstGeom prst="rect">
-            <a:avLst/>
-          </a:prstGeom>
-        </p:spPr>
-      </p:pic>
-      <p:pic>
-        <p:nvPicPr>
-          <p:cNvPr id="3" name="Image 1" descr="preencoded.png">    </p:cNvPr>
-          <p:cNvPicPr>
-            <a:picLocks noChangeAspect="1"/>
-          </p:cNvPicPr>
-          <p:nvPr/>
-        </p:nvPicPr>
-        <p:blipFill>
-          <a:blip r:embed="rId2"/>
-          <a:stretch>
-            <a:fillRect/>
-          </a:stretch>
-        </p:blipFill>
-        <p:spPr>
-          <a:xfrm>
-            <a:off x="4572000" y="365760"/>
-            <a:ext cx="7315200" cy="5029200"/>
-          </a:xfrm>
-          <a:prstGeom prst="rect">
-            <a:avLst/>
-          </a:prstGeom>
-        </p:spPr>
-      </p:pic>
-      <p:sp>
-        <p:nvSpPr>
-          <p:cNvPr id="4" name="Text 0"/>
-          <p:cNvSpPr/>
-          <p:nvPr/>
-        </p:nvSpPr>
-        <p:spPr>
-          <a:xfrm>
-            <a:off x="914400" y="4535424"/>
-            <a:ext cx="5943600" cy="274320"/>
-          </a:xfrm>
-          <a:prstGeom prst="rect">
-            <a:avLst/>
-          </a:prstGeom>
-          <a:noFill/>
-          <a:ln/>
-        </p:spPr>
-        <p:txBody>
-          <a:bodyPr wrap="square" lIns="0" tIns="0" rIns="0" bIns="0" rtlCol="0" anchor="b"/>
-          <a:lstStyle/>
-          <a:p>
-            <a:pPr indent="0" marL="0">
-              <a:buNone/>
-            </a:pPr>
-            <a:r>
-              <a:rPr lang="en-US" sz="1400" spc="150" kern="0" dirty="0">
-                <a:solidFill>
-                  <a:srgbClr val="141413"/>
-                </a:solidFill>
-                <a:latin typeface="Manrope" pitchFamily="34" charset="0"/>
-                <a:ea typeface="Manrope" pitchFamily="34" charset="-122"/>
-                <a:cs typeface="Manrope" pitchFamily="34" charset="-120"/>
-              </a:rPr>
-              <a:t>CHAPTER 01 / NOTICE</a:t>
-            </a:r>
-            <a:endParaRPr lang="en-US" sz="1400" dirty="0"/>
-          </a:p>
-        </p:txBody>
-      </p:sp>
-      <p:sp>
-        <p:nvSpPr>
-          <p:cNvPr id="5" name="Text 1"/>
-          <p:cNvSpPr/>
-          <p:nvPr/>
-        </p:nvSpPr>
-        <p:spPr>
-          <a:xfrm>
-            <a:off x="914400" y="4846320"/>
-            <a:ext cx="8229600" cy="731520"/>
-          </a:xfrm>
-          <a:prstGeom prst="rect">
-            <a:avLst/>
-          </a:prstGeom>
-          <a:noFill/>
-          <a:ln/>
-        </p:spPr>
-        <p:txBody>
-          <a:bodyPr wrap="square" lIns="0" tIns="0" rIns="0" bIns="0" rtlCol="0" anchor="t"/>
-          <a:lstStyle/>
-          <a:p>
-            <a:pPr indent="0" marL="0">
-              <a:buNone/>
-            </a:pPr>
-            <a:r>
-              <a:rPr lang="en-US" sz="4400" b="1" dirty="0">
-                <a:solidFill>
-                  <a:srgbClr val="141413"/>
-                </a:solidFill>
-                <a:latin typeface="Zen Maru Gothic" pitchFamily="34" charset="0"/>
-                <a:ea typeface="Zen Maru Gothic" pitchFamily="34" charset="-122"/>
-                <a:cs typeface="Zen Maru Gothic" pitchFamily="34" charset="-120"/>
-              </a:rPr>
-              <a:t>見つける。</a:t>
-            </a:r>
-            <a:endParaRPr lang="en-US" sz="4400" dirty="0"/>
-          </a:p>
-        </p:txBody>
-      </p:sp>
-      <p:sp>
-        <p:nvSpPr>
-          <p:cNvPr id="6" name="Text 2"/>
-          <p:cNvSpPr/>
-          <p:nvPr/>
-        </p:nvSpPr>
-        <p:spPr>
-          <a:xfrm>
-            <a:off x="932688" y="5724144"/>
-            <a:ext cx="9875520" cy="457200"/>
-          </a:xfrm>
-          <a:prstGeom prst="rect">
-            <a:avLst/>
-          </a:prstGeom>
-          <a:noFill/>
-          <a:ln/>
-        </p:spPr>
-        <p:txBody>
-          <a:bodyPr wrap="square" lIns="0" tIns="0" rIns="0" bIns="0" rtlCol="0" anchor="ctr"/>
-          <a:lstStyle/>
-          <a:p>
-            <a:pPr indent="0" marL="0">
-              <a:buNone/>
-            </a:pPr>
-            <a:r>
-              <a:rPr lang="en-US" sz="1800" dirty="0">
-                <a:solidFill>
-                  <a:srgbClr val="141413"/>
-                </a:solidFill>
-                <a:latin typeface="Zen Maru Gothic" pitchFamily="34" charset="0"/>
-                <a:ea typeface="Zen Maru Gothic" pitchFamily="34" charset="-122"/>
-                <a:cs typeface="Zen Maru Gothic" pitchFamily="34" charset="-120"/>
-              </a:rPr>
-              <a:t>「ちょっと気になる」を、置き去りにしない。</a:t>
-            </a:r>
-            <a:endParaRPr lang="en-US" sz="1800" dirty="0"/>
-          </a:p>
-        </p:txBody>
-      </p:sp>
-      <p:sp>
-        <p:nvSpPr>
-          <p:cNvPr id="7" name="Text 3"/>
-          <p:cNvSpPr/>
-          <p:nvPr/>
-        </p:nvSpPr>
-        <p:spPr>
-          <a:xfrm>
-            <a:off x="10972800" y="6400800"/>
-            <a:ext cx="594360" cy="228600"/>
-          </a:xfrm>
-          <a:prstGeom prst="rect">
-            <a:avLst/>
-          </a:prstGeom>
-          <a:noFill/>
-          <a:ln/>
-        </p:spPr>
-        <p:txBody>
-          <a:bodyPr wrap="square" lIns="0" tIns="0" rIns="0" bIns="0" rtlCol="0" anchor="b"/>
-          <a:lstStyle/>
-          <a:p>
-            <a:pPr algn="r" indent="0" marL="0">
-              <a:buNone/>
-            </a:pPr>
-            <a:r>
-              <a:rPr lang="en-US" sz="1400" dirty="0">
-                <a:solidFill>
-                  <a:srgbClr val="141413"/>
-                </a:solidFill>
-                <a:latin typeface="Manrope" pitchFamily="34" charset="0"/>
-                <a:ea typeface="Manrope" pitchFamily="34" charset="-122"/>
-                <a:cs typeface="Manrope" pitchFamily="34" charset="-120"/>
-              </a:rPr>
-              <a:t>02</a:t>
-            </a:r>
-            <a:endParaRPr lang="en-US" sz="1400" dirty="0"/>
-          </a:p>
-        </p:txBody>
-      </p:sp>
-      <p:sp>
-        <p:nvSpPr>
-          <p:cNvPr id="8" name="Text 4"/>
-          <p:cNvSpPr/>
-          <p:nvPr/>
-        </p:nvSpPr>
-        <p:spPr>
-          <a:xfrm>
-            <a:off x="731520" y="6428232"/>
-            <a:ext cx="9601200" cy="201168"/>
-          </a:xfrm>
-          <a:prstGeom prst="rect">
-            <a:avLst/>
-          </a:prstGeom>
-          <a:noFill/>
-          <a:ln/>
-        </p:spPr>
-        <p:txBody>
-          <a:bodyPr wrap="square" lIns="0" tIns="0" rIns="0" bIns="0" rtlCol="0" anchor="ctr"/>
-          <a:lstStyle/>
-          <a:p>
-            <a:pPr indent="0" marL="0">
-              <a:buNone/>
-            </a:pPr>
-            <a:r>
-              <a:rPr lang="en-US" sz="900" dirty="0">
-                <a:solidFill>
-                  <a:srgbClr val="645D53"/>
-                </a:solidFill>
-                <a:latin typeface="Zen Maru Gothic" pitchFamily="34" charset="0"/>
-                <a:ea typeface="Zen Maru Gothic" pitchFamily="34" charset="-122"/>
-                <a:cs typeface="Zen Maru Gothic" pitchFamily="34" charset="-120"/>
-              </a:rPr>
-              <a:t>チームのアイデアを、育てる。 / 章扉サンプル</a:t>
-            </a:r>
-            <a:endParaRPr lang="en-US" sz="900" dirty="0"/>
-          </a:p>
-        </p:txBody>
-      </p:sp>
-    </p:spTree>
-  </p:cSld>
-  <p:clrMapOvr>
-    <a:masterClrMapping/>
-  </p:clrMapOvr>
-</p:sld>
+<ns0:sld xmlns:ns0="http://schemas.openxmlformats.org/presentationml/2006/main" xmlns:ns1="http://schemas.openxmlformats.org/drawingml/2006/main" xmlns:ns2="http://schemas.openxmlformats.org/officeDocument/2006/relationships">
+  <ns0:cSld name="Slide 2">
+    <ns0:bg>
+      <ns0:bgPr>
+        <ns1:solidFill>
+          <ns1:srgbClr val="BBD1C9"/>
+        </ns1:solidFill>
+      </ns0:bgPr>
+    </ns0:bg>
+    <ns0:spTree>
+      <ns0:nvGrpSpPr>
+        <ns0:cNvPr id="1" name=""/>
+        <ns0:cNvGrpSpPr/>
+        <ns0:nvPr/>
+      </ns0:nvGrpSpPr>
+      <ns0:grpSpPr>
+        <ns1:xfrm>
+          <ns1:off x="0" y="0"/>
+          <ns1:ext cx="0" cy="0"/>
+          <ns1:chOff x="0" y="0"/>
+          <ns1:chExt cx="0" cy="0"/>
+        </ns1:xfrm>
+      </ns0:grpSpPr>
+      <ns0:pic>
+        <ns0:nvPicPr>
+          <ns0:cNvPr id="2" name="Image 0" descr="preencoded.png">    </ns0:cNvPr>
+          <ns0:cNvPicPr>
+            <ns1:picLocks noChangeAspect="1"/>
+          </ns0:cNvPicPr>
+          <ns0:nvPr/>
+        </ns0:nvPicPr>
+        <ns0:blipFill>
+          <ns1:blip ns2:embed="rId1"/>
+          <ns1:stretch>
+            <ns1:fillRect/>
+          </ns1:stretch>
+        </ns0:blipFill>
+        <ns0:spPr>
+          <ns1:xfrm>
+            <ns1:off x="4572000" y="365760"/>
+            <ns1:ext cx="7315200" cy="5029200"/>
+          </ns1:xfrm>
+          <ns1:prstGeom prst="rect">
+            <ns1:avLst/>
+          </ns1:prstGeom>
+        </ns0:spPr>
+      </ns0:pic>
+      <ns0:sp>
+        <ns0:nvSpPr>
+          <ns0:cNvPr id="3" name="Text 0"/>
+          <ns0:cNvSpPr/>
+          <ns0:nvPr/>
+        </ns0:nvSpPr>
+        <ns0:spPr>
+          <ns1:xfrm>
+            <ns1:off x="914400" y="4572000"/>
+            <ns1:ext cx="3657600" cy="274320"/>
+          </ns1:xfrm>
+          <ns1:prstGeom prst="rect">
+            <ns1:avLst/>
+          </ns1:prstGeom>
+          <ns1:noFill/>
+          <ns1:ln/>
+        </ns0:spPr>
+        <ns0:txBody>
+          <ns1:bodyPr wrap="square" lIns="0" tIns="0" rIns="0" bIns="0" rtlCol="0" anchor="b"/>
+          <ns1:lstStyle/>
+          <ns1:p>
+            <ns1:pPr indent="0" marL="0">
+              <ns1:buNone/>
+            </ns1:pPr>
+            <ns1:r>
+              <ns1:rPr lang="en-US" sz="1400" dirty="0">
+                <ns1:solidFill>
+                  <ns1:srgbClr val="141413"/>
+                </ns1:solidFill>
+                <ns1:latin typeface="Calibri" pitchFamily="34" charset="0"/>
+                <ns1:ea typeface="Calibri" pitchFamily="34" charset="-122"/>
+                <ns1:cs typeface="Calibri" pitchFamily="34" charset="-120"/>
+              </ns1:rPr>
+              <ns1:t>Chapter 1</ns1:t>
+            </ns1:r>
+            <ns1:endParaRPr lang="en-US" sz="1400" dirty="0"/>
+          </ns1:p>
+        </ns0:txBody>
+      </ns0:sp>
+      <ns0:sp>
+        <ns0:nvSpPr>
+          <ns0:cNvPr id="4" name="Text 1"/>
+          <ns0:cNvSpPr/>
+          <ns0:nvPr/>
+        </ns0:nvSpPr>
+        <ns0:spPr>
+          <ns1:xfrm>
+            <ns1:off x="914400" y="4846320"/>
+            <ns1:ext cx="8229600" cy="914400"/>
+          </ns1:xfrm>
+          <ns1:prstGeom prst="rect">
+            <ns1:avLst/>
+          </ns1:prstGeom>
+          <ns1:noFill/>
+          <ns1:ln/>
+        </ns0:spPr>
+        <ns0:txBody>
+          <ns1:bodyPr wrap="square" lIns="0" tIns="0" rIns="0" bIns="0" rtlCol="0" anchor="t"/>
+          <ns1:lstStyle/>
+          <ns1:p>
+            <ns1:pPr indent="0" marL="0">
+              <ns1:buNone/>
+            </ns1:pPr>
+            <ns1:r>
+              <ns1:rPr lang="en-US" sz="4000" dirty="0">
+                <ns1:solidFill>
+                  <ns1:srgbClr val="141413"/>
+                </ns1:solidFill>
+                <ns1:latin typeface="Georgia" pitchFamily="34" charset="0"/>
+                <ns1:ea typeface="Yu Mincho" pitchFamily="34" charset="-122"/>
+                <ns1:cs typeface="Georgia" pitchFamily="34" charset="-120"/>
+              </ns1:rPr>
+              <ns1:t>気づきを集める</ns1:t>
+            </ns1:r>
+            <ns1:endParaRPr lang="en-US" sz="4000" dirty="0"/>
+          </ns1:p>
+        </ns0:txBody>
+      </ns0:sp>
+      <ns0:sp>
+        <ns0:nvSpPr>
+          <ns0:cNvPr id="5" name="Text 2"/>
+          <ns0:cNvSpPr/>
+          <ns0:nvPr/>
+        </ns0:nvSpPr>
+        <ns0:spPr>
+          <ns1:xfrm>
+            <ns1:off x="11247120" y="6400800"/>
+            <ns1:ext cx="457200" cy="228600"/>
+          </ns1:xfrm>
+          <ns1:prstGeom prst="rect">
+            <ns1:avLst/>
+          </ns1:prstGeom>
+          <ns1:noFill/>
+          <ns1:ln/>
+        </ns0:spPr>
+        <ns0:txBody>
+          <ns1:bodyPr wrap="square" lIns="0" tIns="0" rIns="0" bIns="0" rtlCol="0" anchor="b"/>
+          <ns1:lstStyle/>
+          <ns1:p>
+            <ns1:pPr algn="r" indent="0" marL="0">
+              <ns1:buNone/>
+            </ns1:pPr>
+            <ns1:r>
+              <ns1:rPr lang="en-US" sz="1400" dirty="0">
+                <ns1:solidFill>
+                  <ns1:srgbClr val="141413"/>
+                </ns1:solidFill>
+                <ns1:latin typeface="Calibri" pitchFamily="34" charset="0"/>
+                <ns1:ea typeface="Calibri" pitchFamily="34" charset="-122"/>
+                <ns1:cs typeface="Calibri" pitchFamily="34" charset="-120"/>
+              </ns1:rPr>
+              <ns1:t>2</ns1:t>
+            </ns1:r>
+            <ns1:endParaRPr lang="en-US" sz="1400" dirty="0"/>
+          </ns1:p>
+        </ns0:txBody>
+      </ns0:sp>
+    </ns0:spTree>
+  </ns0:cSld>
+  <ns0:clrMapOvr>
+    <ns1:masterClrMapping/>
+  </ns0:clrMapOvr>
+</ns0:sld>
 </file>
 
 <file path=ppt/slides/slide3.xml><?xml version="1.0" encoding="utf-8"?>
-<p:sld xmlns:a="http://schemas.openxmlformats.org/drawingml/2006/main" xmlns:r="http://schemas.openxmlformats.org/officeDocument/2006/relationships" xmlns:p="http://schemas.openxmlformats.org/presentationml/2006/main">
-  <p:cSld name="Slide 3">
-    <p:bg>
-      <p:bgPr>
-        <a:solidFill>
-          <a:srgbClr val="F7E6DE"/>
-        </a:solidFill>
-      </p:bgPr>
-    </p:bg>
-    <p:spTree>
-      <p:nvGrpSpPr>
-        <p:cNvPr id="1" name=""/>
-        <p:cNvGrpSpPr/>
-        <p:nvPr/>
-      </p:nvGrpSpPr>
-      <p:grpSpPr>
-        <a:xfrm>
-          <a:off x="0" y="0"/>
-          <a:ext cx="0" cy="0"/>
-          <a:chOff x="0" y="0"/>
-          <a:chExt cx="0" cy="0"/>
-        </a:xfrm>
-      </p:grpSpPr>
-      <p:pic>
-        <p:nvPicPr>
-          <p:cNvPr id="2" name="Image 0" descr="preencoded.png">    </p:cNvPr>
-          <p:cNvPicPr>
-            <a:picLocks noChangeAspect="1"/>
-          </p:cNvPicPr>
-          <p:nvPr/>
-        </p:nvPicPr>
-        <p:blipFill>
-          <a:blip r:embed="rId1"/>
-          <a:stretch>
-            <a:fillRect/>
-          </a:stretch>
-        </p:blipFill>
-        <p:spPr>
-          <a:xfrm>
-            <a:off x="228600" y="182880"/>
-            <a:ext cx="11722608" cy="6181344"/>
-          </a:xfrm>
-          <a:prstGeom prst="rect">
-            <a:avLst/>
-          </a:prstGeom>
-        </p:spPr>
-      </p:pic>
-      <p:pic>
-        <p:nvPicPr>
-          <p:cNvPr id="3" name="Image 1" descr="preencoded.png">    </p:cNvPr>
-          <p:cNvPicPr>
-            <a:picLocks noChangeAspect="1"/>
-          </p:cNvPicPr>
-          <p:nvPr/>
-        </p:nvPicPr>
-        <p:blipFill>
-          <a:blip r:embed="rId2"/>
-          <a:stretch>
-            <a:fillRect/>
-          </a:stretch>
-        </p:blipFill>
-        <p:spPr>
-          <a:xfrm>
-            <a:off x="4572000" y="365760"/>
-            <a:ext cx="7315200" cy="5029200"/>
-          </a:xfrm>
-          <a:prstGeom prst="rect">
-            <a:avLst/>
-          </a:prstGeom>
-        </p:spPr>
-      </p:pic>
-      <p:sp>
-        <p:nvSpPr>
-          <p:cNvPr id="4" name="Text 0"/>
-          <p:cNvSpPr/>
-          <p:nvPr/>
-        </p:nvSpPr>
-        <p:spPr>
-          <a:xfrm>
-            <a:off x="914400" y="4535424"/>
-            <a:ext cx="5943600" cy="274320"/>
-          </a:xfrm>
-          <a:prstGeom prst="rect">
-            <a:avLst/>
-          </a:prstGeom>
-          <a:noFill/>
-          <a:ln/>
-        </p:spPr>
-        <p:txBody>
-          <a:bodyPr wrap="square" lIns="0" tIns="0" rIns="0" bIns="0" rtlCol="0" anchor="b"/>
-          <a:lstStyle/>
-          <a:p>
-            <a:pPr indent="0" marL="0">
-              <a:buNone/>
-            </a:pPr>
-            <a:r>
-              <a:rPr lang="en-US" sz="1400" spc="150" kern="0" dirty="0">
-                <a:solidFill>
-                  <a:srgbClr val="141413"/>
-                </a:solidFill>
-                <a:latin typeface="Manrope" pitchFamily="34" charset="0"/>
-                <a:ea typeface="Manrope" pitchFamily="34" charset="-122"/>
-                <a:cs typeface="Manrope" pitchFamily="34" charset="-120"/>
-              </a:rPr>
-              <a:t>CHAPTER 02 / SHARE</a:t>
-            </a:r>
-            <a:endParaRPr lang="en-US" sz="1400" dirty="0"/>
-          </a:p>
-        </p:txBody>
-      </p:sp>
-      <p:sp>
-        <p:nvSpPr>
-          <p:cNvPr id="5" name="Text 1"/>
-          <p:cNvSpPr/>
-          <p:nvPr/>
-        </p:nvSpPr>
-        <p:spPr>
-          <a:xfrm>
-            <a:off x="914400" y="4846320"/>
-            <a:ext cx="8229600" cy="731520"/>
-          </a:xfrm>
-          <a:prstGeom prst="rect">
-            <a:avLst/>
-          </a:prstGeom>
-          <a:noFill/>
-          <a:ln/>
-        </p:spPr>
-        <p:txBody>
-          <a:bodyPr wrap="square" lIns="0" tIns="0" rIns="0" bIns="0" rtlCol="0" anchor="t"/>
-          <a:lstStyle/>
-          <a:p>
-            <a:pPr indent="0" marL="0">
-              <a:buNone/>
-            </a:pPr>
-            <a:r>
-              <a:rPr lang="en-US" sz="4400" b="1" dirty="0">
-                <a:solidFill>
-                  <a:srgbClr val="141413"/>
-                </a:solidFill>
-                <a:latin typeface="Zen Maru Gothic" pitchFamily="34" charset="0"/>
-                <a:ea typeface="Zen Maru Gothic" pitchFamily="34" charset="-122"/>
-                <a:cs typeface="Zen Maru Gothic" pitchFamily="34" charset="-120"/>
-              </a:rPr>
-              <a:t>話してみる。</a:t>
-            </a:r>
-            <a:endParaRPr lang="en-US" sz="4400" dirty="0"/>
-          </a:p>
-        </p:txBody>
-      </p:sp>
-      <p:sp>
-        <p:nvSpPr>
-          <p:cNvPr id="6" name="Text 2"/>
-          <p:cNvSpPr/>
-          <p:nvPr/>
-        </p:nvSpPr>
-        <p:spPr>
-          <a:xfrm>
-            <a:off x="932688" y="5724144"/>
-            <a:ext cx="9875520" cy="457200"/>
-          </a:xfrm>
-          <a:prstGeom prst="rect">
-            <a:avLst/>
-          </a:prstGeom>
-          <a:noFill/>
-          <a:ln/>
-        </p:spPr>
-        <p:txBody>
-          <a:bodyPr wrap="square" lIns="0" tIns="0" rIns="0" bIns="0" rtlCol="0" anchor="ctr"/>
-          <a:lstStyle/>
-          <a:p>
-            <a:pPr indent="0" marL="0">
-              <a:buNone/>
-            </a:pPr>
-            <a:r>
-              <a:rPr lang="en-US" sz="1800" dirty="0">
-                <a:solidFill>
-                  <a:srgbClr val="141413"/>
-                </a:solidFill>
-                <a:latin typeface="Zen Maru Gothic" pitchFamily="34" charset="0"/>
-                <a:ea typeface="Zen Maru Gothic" pitchFamily="34" charset="-122"/>
-                <a:cs typeface="Zen Maru Gothic" pitchFamily="34" charset="-120"/>
-              </a:rPr>
-              <a:t>まだ答えにならない言葉にも、耳を澄ます。</a:t>
-            </a:r>
-            <a:endParaRPr lang="en-US" sz="1800" dirty="0"/>
-          </a:p>
-        </p:txBody>
-      </p:sp>
-      <p:sp>
-        <p:nvSpPr>
-          <p:cNvPr id="7" name="Text 3"/>
-          <p:cNvSpPr/>
-          <p:nvPr/>
-        </p:nvSpPr>
-        <p:spPr>
-          <a:xfrm>
-            <a:off x="10972800" y="6400800"/>
-            <a:ext cx="594360" cy="228600"/>
-          </a:xfrm>
-          <a:prstGeom prst="rect">
-            <a:avLst/>
-          </a:prstGeom>
-          <a:noFill/>
-          <a:ln/>
-        </p:spPr>
-        <p:txBody>
-          <a:bodyPr wrap="square" lIns="0" tIns="0" rIns="0" bIns="0" rtlCol="0" anchor="b"/>
-          <a:lstStyle/>
-          <a:p>
-            <a:pPr algn="r" indent="0" marL="0">
-              <a:buNone/>
-            </a:pPr>
-            <a:r>
-              <a:rPr lang="en-US" sz="1400" dirty="0">
-                <a:solidFill>
-                  <a:srgbClr val="141413"/>
-                </a:solidFill>
-                <a:latin typeface="Manrope" pitchFamily="34" charset="0"/>
-                <a:ea typeface="Manrope" pitchFamily="34" charset="-122"/>
-                <a:cs typeface="Manrope" pitchFamily="34" charset="-120"/>
-              </a:rPr>
-              <a:t>03</a:t>
-            </a:r>
-            <a:endParaRPr lang="en-US" sz="1400" dirty="0"/>
-          </a:p>
-        </p:txBody>
-      </p:sp>
-      <p:sp>
-        <p:nvSpPr>
-          <p:cNvPr id="8" name="Text 4"/>
-          <p:cNvSpPr/>
-          <p:nvPr/>
-        </p:nvSpPr>
-        <p:spPr>
-          <a:xfrm>
-            <a:off x="731520" y="6428232"/>
-            <a:ext cx="9601200" cy="201168"/>
-          </a:xfrm>
-          <a:prstGeom prst="rect">
-            <a:avLst/>
-          </a:prstGeom>
-          <a:noFill/>
-          <a:ln/>
-        </p:spPr>
-        <p:txBody>
-          <a:bodyPr wrap="square" lIns="0" tIns="0" rIns="0" bIns="0" rtlCol="0" anchor="ctr"/>
-          <a:lstStyle/>
-          <a:p>
-            <a:pPr indent="0" marL="0">
-              <a:buNone/>
-            </a:pPr>
-            <a:r>
-              <a:rPr lang="en-US" sz="900" dirty="0">
-                <a:solidFill>
-                  <a:srgbClr val="645D53"/>
-                </a:solidFill>
-                <a:latin typeface="Zen Maru Gothic" pitchFamily="34" charset="0"/>
-                <a:ea typeface="Zen Maru Gothic" pitchFamily="34" charset="-122"/>
-                <a:cs typeface="Zen Maru Gothic" pitchFamily="34" charset="-120"/>
-              </a:rPr>
-              <a:t>チームのアイデアを、育てる。 / 章扉サンプル</a:t>
-            </a:r>
-            <a:endParaRPr lang="en-US" sz="900" dirty="0"/>
-          </a:p>
-        </p:txBody>
-      </p:sp>
-    </p:spTree>
-  </p:cSld>
-  <p:clrMapOvr>
-    <a:masterClrMapping/>
-  </p:clrMapOvr>
-</p:sld>
+<ns0:sld xmlns:ns0="http://schemas.openxmlformats.org/presentationml/2006/main" xmlns:ns1="http://schemas.openxmlformats.org/drawingml/2006/main" xmlns:ns2="http://schemas.openxmlformats.org/officeDocument/2006/relationships">
+  <ns0:cSld name="Slide 3">
+    <ns0:bg>
+      <ns0:bgPr>
+        <ns1:solidFill>
+          <ns1:srgbClr val="DEB89C"/>
+        </ns1:solidFill>
+      </ns0:bgPr>
+    </ns0:bg>
+    <ns0:spTree>
+      <ns0:nvGrpSpPr>
+        <ns0:cNvPr id="1" name=""/>
+        <ns0:cNvGrpSpPr/>
+        <ns0:nvPr/>
+      </ns0:nvGrpSpPr>
+      <ns0:grpSpPr>
+        <ns1:xfrm>
+          <ns1:off x="0" y="0"/>
+          <ns1:ext cx="0" cy="0"/>
+          <ns1:chOff x="0" y="0"/>
+          <ns1:chExt cx="0" cy="0"/>
+        </ns1:xfrm>
+      </ns0:grpSpPr>
+      <ns0:pic>
+        <ns0:nvPicPr>
+          <ns0:cNvPr id="2" name="Image 0" descr="preencoded.png">    </ns0:cNvPr>
+          <ns0:cNvPicPr>
+            <ns1:picLocks noChangeAspect="1"/>
+          </ns0:cNvPicPr>
+          <ns0:nvPr/>
+        </ns0:nvPicPr>
+        <ns0:blipFill>
+          <ns1:blip ns2:embed="rId1"/>
+          <ns1:stretch>
+            <ns1:fillRect/>
+          </ns1:stretch>
+        </ns0:blipFill>
+        <ns0:spPr>
+          <ns1:xfrm>
+            <ns1:off x="4572000" y="365760"/>
+            <ns1:ext cx="7315200" cy="5029200"/>
+          </ns1:xfrm>
+          <ns1:prstGeom prst="rect">
+            <ns1:avLst/>
+          </ns1:prstGeom>
+        </ns0:spPr>
+      </ns0:pic>
+      <ns0:sp>
+        <ns0:nvSpPr>
+          <ns0:cNvPr id="3" name="Text 0"/>
+          <ns0:cNvSpPr/>
+          <ns0:nvPr/>
+        </ns0:nvSpPr>
+        <ns0:spPr>
+          <ns1:xfrm>
+            <ns1:off x="914400" y="4572000"/>
+            <ns1:ext cx="3657600" cy="274320"/>
+          </ns1:xfrm>
+          <ns1:prstGeom prst="rect">
+            <ns1:avLst/>
+          </ns1:prstGeom>
+          <ns1:noFill/>
+          <ns1:ln/>
+        </ns0:spPr>
+        <ns0:txBody>
+          <ns1:bodyPr wrap="square" lIns="0" tIns="0" rIns="0" bIns="0" rtlCol="0" anchor="b"/>
+          <ns1:lstStyle/>
+          <ns1:p>
+            <ns1:pPr indent="0" marL="0">
+              <ns1:buNone/>
+            </ns1:pPr>
+            <ns1:r>
+              <ns1:rPr lang="en-US" sz="1400" dirty="0">
+                <ns1:solidFill>
+                  <ns1:srgbClr val="141413"/>
+                </ns1:solidFill>
+                <ns1:latin typeface="Calibri" pitchFamily="34" charset="0"/>
+                <ns1:ea typeface="Calibri" pitchFamily="34" charset="-122"/>
+                <ns1:cs typeface="Calibri" pitchFamily="34" charset="-120"/>
+              </ns1:rPr>
+              <ns1:t>Chapter 2</ns1:t>
+            </ns1:r>
+            <ns1:endParaRPr lang="en-US" sz="1400" dirty="0"/>
+          </ns1:p>
+        </ns0:txBody>
+      </ns0:sp>
+      <ns0:sp>
+        <ns0:nvSpPr>
+          <ns0:cNvPr id="4" name="Text 1"/>
+          <ns0:cNvSpPr/>
+          <ns0:nvPr/>
+        </ns0:nvSpPr>
+        <ns0:spPr>
+          <ns1:xfrm>
+            <ns1:off x="914400" y="4846320"/>
+            <ns1:ext cx="8229600" cy="914400"/>
+          </ns1:xfrm>
+          <ns1:prstGeom prst="rect">
+            <ns1:avLst/>
+          </ns1:prstGeom>
+          <ns1:noFill/>
+          <ns1:ln/>
+        </ns0:spPr>
+        <ns0:txBody>
+          <ns1:bodyPr wrap="square" lIns="0" tIns="0" rIns="0" bIns="0" rtlCol="0" anchor="t"/>
+          <ns1:lstStyle/>
+          <ns1:p>
+            <ns1:pPr indent="0" marL="0">
+              <ns1:buNone/>
+            </ns1:pPr>
+            <ns1:r>
+              <ns1:rPr lang="en-US" sz="4000" dirty="0">
+                <ns1:solidFill>
+                  <ns1:srgbClr val="141413"/>
+                </ns1:solidFill>
+                <ns1:latin typeface="Georgia" pitchFamily="34" charset="0"/>
+                <ns1:ea typeface="Yu Mincho" pitchFamily="34" charset="-122"/>
+                <ns1:cs typeface="Georgia" pitchFamily="34" charset="-120"/>
+              </ns1:rPr>
+              <ns1:t>意見を共有する</ns1:t>
+            </ns1:r>
+            <ns1:endParaRPr lang="en-US" sz="4000" dirty="0"/>
+          </ns1:p>
+        </ns0:txBody>
+      </ns0:sp>
+      <ns0:sp>
+        <ns0:nvSpPr>
+          <ns0:cNvPr id="5" name="Text 2"/>
+          <ns0:cNvSpPr/>
+          <ns0:nvPr/>
+        </ns0:nvSpPr>
+        <ns0:spPr>
+          <ns1:xfrm>
+            <ns1:off x="11247120" y="6400800"/>
+            <ns1:ext cx="457200" cy="228600"/>
+          </ns1:xfrm>
+          <ns1:prstGeom prst="rect">
+            <ns1:avLst/>
+          </ns1:prstGeom>
+          <ns1:noFill/>
+          <ns1:ln/>
+        </ns0:spPr>
+        <ns0:txBody>
+          <ns1:bodyPr wrap="square" lIns="0" tIns="0" rIns="0" bIns="0" rtlCol="0" anchor="b"/>
+          <ns1:lstStyle/>
+          <ns1:p>
+            <ns1:pPr algn="r" indent="0" marL="0">
+              <ns1:buNone/>
+            </ns1:pPr>
+            <ns1:r>
+              <ns1:rPr lang="en-US" sz="1400" dirty="0">
+                <ns1:solidFill>
+                  <ns1:srgbClr val="141413"/>
+                </ns1:solidFill>
+                <ns1:latin typeface="Calibri" pitchFamily="34" charset="0"/>
+                <ns1:ea typeface="Calibri" pitchFamily="34" charset="-122"/>
+                <ns1:cs typeface="Calibri" pitchFamily="34" charset="-120"/>
+              </ns1:rPr>
+              <ns1:t>3</ns1:t>
+            </ns1:r>
+            <ns1:endParaRPr lang="en-US" sz="1400" dirty="0"/>
+          </ns1:p>
+        </ns0:txBody>
+      </ns0:sp>
+    </ns0:spTree>
+  </ns0:cSld>
+  <ns0:clrMapOvr>
+    <ns1:masterClrMapping/>
+  </ns0:clrMapOvr>
+</ns0:sld>
 </file>
 
 <file path=ppt/slides/slide4.xml><?xml version="1.0" encoding="utf-8"?>
-<p:sld xmlns:a="http://schemas.openxmlformats.org/drawingml/2006/main" xmlns:r="http://schemas.openxmlformats.org/officeDocument/2006/relationships" xmlns:p="http://schemas.openxmlformats.org/presentationml/2006/main">
-  <p:cSld name="Slide 4">
-    <p:bg>
-      <p:bgPr>
-        <a:solidFill>
-          <a:srgbClr val="E5E6D8"/>
-        </a:solidFill>
-      </p:bgPr>
-    </p:bg>
-    <p:spTree>
-      <p:nvGrpSpPr>
-        <p:cNvPr id="1" name=""/>
-        <p:cNvGrpSpPr/>
-        <p:nvPr/>
-      </p:nvGrpSpPr>
-      <p:grpSpPr>
-        <a:xfrm>
-          <a:off x="0" y="0"/>
-          <a:ext cx="0" cy="0"/>
-          <a:chOff x="0" y="0"/>
-          <a:chExt cx="0" cy="0"/>
-        </a:xfrm>
-      </p:grpSpPr>
-      <p:pic>
-        <p:nvPicPr>
-          <p:cNvPr id="2" name="Image 0" descr="preencoded.png">    </p:cNvPr>
-          <p:cNvPicPr>
-            <a:picLocks noChangeAspect="1"/>
-          </p:cNvPicPr>
-          <p:nvPr/>
-        </p:nvPicPr>
-        <p:blipFill>
-          <a:blip r:embed="rId1"/>
-          <a:stretch>
-            <a:fillRect/>
-          </a:stretch>
-        </p:blipFill>
-        <p:spPr>
-          <a:xfrm>
-            <a:off x="228600" y="182880"/>
-            <a:ext cx="11722608" cy="6181344"/>
-          </a:xfrm>
-          <a:prstGeom prst="rect">
-            <a:avLst/>
-          </a:prstGeom>
-        </p:spPr>
-      </p:pic>
-      <p:pic>
-        <p:nvPicPr>
-          <p:cNvPr id="3" name="Image 1" descr="preencoded.png">    </p:cNvPr>
-          <p:cNvPicPr>
-            <a:picLocks noChangeAspect="1"/>
-          </p:cNvPicPr>
-          <p:nvPr/>
-        </p:nvPicPr>
-        <p:blipFill>
-          <a:blip r:embed="rId2"/>
-          <a:stretch>
-            <a:fillRect/>
-          </a:stretch>
-        </p:blipFill>
-        <p:spPr>
-          <a:xfrm>
-            <a:off x="4572000" y="365760"/>
-            <a:ext cx="7315200" cy="5029200"/>
-          </a:xfrm>
-          <a:prstGeom prst="rect">
-            <a:avLst/>
-          </a:prstGeom>
-        </p:spPr>
-      </p:pic>
-      <p:sp>
-        <p:nvSpPr>
-          <p:cNvPr id="4" name="Text 0"/>
-          <p:cNvSpPr/>
-          <p:nvPr/>
-        </p:nvSpPr>
-        <p:spPr>
-          <a:xfrm>
-            <a:off x="914400" y="4535424"/>
-            <a:ext cx="5943600" cy="274320"/>
-          </a:xfrm>
-          <a:prstGeom prst="rect">
-            <a:avLst/>
-          </a:prstGeom>
-          <a:noFill/>
-          <a:ln/>
-        </p:spPr>
-        <p:txBody>
-          <a:bodyPr wrap="square" lIns="0" tIns="0" rIns="0" bIns="0" rtlCol="0" anchor="b"/>
-          <a:lstStyle/>
-          <a:p>
-            <a:pPr indent="0" marL="0">
-              <a:buNone/>
-            </a:pPr>
-            <a:r>
-              <a:rPr lang="en-US" sz="1400" spc="150" kern="0" dirty="0">
-                <a:solidFill>
-                  <a:srgbClr val="141413"/>
-                </a:solidFill>
-                <a:latin typeface="Manrope" pitchFamily="34" charset="0"/>
-                <a:ea typeface="Manrope" pitchFamily="34" charset="-122"/>
-                <a:cs typeface="Manrope" pitchFamily="34" charset="-120"/>
-              </a:rPr>
-              <a:t>CHAPTER 03 / TRY</a:t>
-            </a:r>
-            <a:endParaRPr lang="en-US" sz="1400" dirty="0"/>
-          </a:p>
-        </p:txBody>
-      </p:sp>
-      <p:sp>
-        <p:nvSpPr>
-          <p:cNvPr id="5" name="Text 1"/>
-          <p:cNvSpPr/>
-          <p:nvPr/>
-        </p:nvSpPr>
-        <p:spPr>
-          <a:xfrm>
-            <a:off x="914400" y="4846320"/>
-            <a:ext cx="8229600" cy="731520"/>
-          </a:xfrm>
-          <a:prstGeom prst="rect">
-            <a:avLst/>
-          </a:prstGeom>
-          <a:noFill/>
-          <a:ln/>
-        </p:spPr>
-        <p:txBody>
-          <a:bodyPr wrap="square" lIns="0" tIns="0" rIns="0" bIns="0" rtlCol="0" anchor="t"/>
-          <a:lstStyle/>
-          <a:p>
-            <a:pPr indent="0" marL="0">
-              <a:buNone/>
-            </a:pPr>
-            <a:r>
-              <a:rPr lang="en-US" sz="4400" b="1" dirty="0">
-                <a:solidFill>
-                  <a:srgbClr val="141413"/>
-                </a:solidFill>
-                <a:latin typeface="Zen Maru Gothic" pitchFamily="34" charset="0"/>
-                <a:ea typeface="Zen Maru Gothic" pitchFamily="34" charset="-122"/>
-                <a:cs typeface="Zen Maru Gothic" pitchFamily="34" charset="-120"/>
-              </a:rPr>
-              <a:t>試してみる。</a:t>
-            </a:r>
-            <a:endParaRPr lang="en-US" sz="4400" dirty="0"/>
-          </a:p>
-        </p:txBody>
-      </p:sp>
-      <p:sp>
-        <p:nvSpPr>
-          <p:cNvPr id="6" name="Text 2"/>
-          <p:cNvSpPr/>
-          <p:nvPr/>
-        </p:nvSpPr>
-        <p:spPr>
-          <a:xfrm>
-            <a:off x="932688" y="5724144"/>
-            <a:ext cx="9875520" cy="457200"/>
-          </a:xfrm>
-          <a:prstGeom prst="rect">
-            <a:avLst/>
-          </a:prstGeom>
-          <a:noFill/>
-          <a:ln/>
-        </p:spPr>
-        <p:txBody>
-          <a:bodyPr wrap="square" lIns="0" tIns="0" rIns="0" bIns="0" rtlCol="0" anchor="ctr"/>
-          <a:lstStyle/>
-          <a:p>
-            <a:pPr indent="0" marL="0">
-              <a:buNone/>
-            </a:pPr>
-            <a:r>
-              <a:rPr lang="en-US" sz="1800" dirty="0">
-                <a:solidFill>
-                  <a:srgbClr val="141413"/>
-                </a:solidFill>
-                <a:latin typeface="Zen Maru Gothic" pitchFamily="34" charset="0"/>
-                <a:ea typeface="Zen Maru Gothic" pitchFamily="34" charset="-122"/>
-                <a:cs typeface="Zen Maru Gothic" pitchFamily="34" charset="-120"/>
-              </a:rPr>
-              <a:t>大きく決める前に、小さく手を動かす。</a:t>
-            </a:r>
-            <a:endParaRPr lang="en-US" sz="1800" dirty="0"/>
-          </a:p>
-        </p:txBody>
-      </p:sp>
-      <p:sp>
-        <p:nvSpPr>
-          <p:cNvPr id="7" name="Text 3"/>
-          <p:cNvSpPr/>
-          <p:nvPr/>
-        </p:nvSpPr>
-        <p:spPr>
-          <a:xfrm>
-            <a:off x="10972800" y="6400800"/>
-            <a:ext cx="594360" cy="228600"/>
-          </a:xfrm>
-          <a:prstGeom prst="rect">
-            <a:avLst/>
-          </a:prstGeom>
-          <a:noFill/>
-          <a:ln/>
-        </p:spPr>
-        <p:txBody>
-          <a:bodyPr wrap="square" lIns="0" tIns="0" rIns="0" bIns="0" rtlCol="0" anchor="b"/>
-          <a:lstStyle/>
-          <a:p>
-            <a:pPr algn="r" indent="0" marL="0">
-              <a:buNone/>
-            </a:pPr>
-            <a:r>
-              <a:rPr lang="en-US" sz="1400" dirty="0">
-                <a:solidFill>
-                  <a:srgbClr val="141413"/>
-                </a:solidFill>
-                <a:latin typeface="Manrope" pitchFamily="34" charset="0"/>
-                <a:ea typeface="Manrope" pitchFamily="34" charset="-122"/>
-                <a:cs typeface="Manrope" pitchFamily="34" charset="-120"/>
-              </a:rPr>
-              <a:t>04</a:t>
-            </a:r>
-            <a:endParaRPr lang="en-US" sz="1400" dirty="0"/>
-          </a:p>
-        </p:txBody>
-      </p:sp>
-      <p:sp>
-        <p:nvSpPr>
-          <p:cNvPr id="8" name="Text 4"/>
-          <p:cNvSpPr/>
-          <p:nvPr/>
-        </p:nvSpPr>
-        <p:spPr>
-          <a:xfrm>
-            <a:off x="731520" y="6428232"/>
-            <a:ext cx="9601200" cy="201168"/>
-          </a:xfrm>
-          <a:prstGeom prst="rect">
-            <a:avLst/>
-          </a:prstGeom>
-          <a:noFill/>
-          <a:ln/>
-        </p:spPr>
-        <p:txBody>
-          <a:bodyPr wrap="square" lIns="0" tIns="0" rIns="0" bIns="0" rtlCol="0" anchor="ctr"/>
-          <a:lstStyle/>
-          <a:p>
-            <a:pPr indent="0" marL="0">
-              <a:buNone/>
-            </a:pPr>
-            <a:r>
-              <a:rPr lang="en-US" sz="900" dirty="0">
-                <a:solidFill>
-                  <a:srgbClr val="645D53"/>
-                </a:solidFill>
-                <a:latin typeface="Zen Maru Gothic" pitchFamily="34" charset="0"/>
-                <a:ea typeface="Zen Maru Gothic" pitchFamily="34" charset="-122"/>
-                <a:cs typeface="Zen Maru Gothic" pitchFamily="34" charset="-120"/>
-              </a:rPr>
-              <a:t>チームのアイデアを、育てる。 / 章扉サンプル</a:t>
-            </a:r>
-            <a:endParaRPr lang="en-US" sz="900" dirty="0"/>
-          </a:p>
-        </p:txBody>
-      </p:sp>
-    </p:spTree>
-  </p:cSld>
-  <p:clrMapOvr>
-    <a:masterClrMapping/>
-  </p:clrMapOvr>
-</p:sld>
+<ns0:sld xmlns:ns0="http://schemas.openxmlformats.org/presentationml/2006/main" xmlns:ns1="http://schemas.openxmlformats.org/drawingml/2006/main" xmlns:ns2="http://schemas.openxmlformats.org/officeDocument/2006/relationships">
+  <ns0:cSld name="Slide 4">
+    <ns0:bg>
+      <ns0:bgPr>
+        <ns1:solidFill>
+          <ns1:srgbClr val="7B9EB2"/>
+        </ns1:solidFill>
+      </ns0:bgPr>
+    </ns0:bg>
+    <ns0:spTree>
+      <ns0:nvGrpSpPr>
+        <ns0:cNvPr id="1" name=""/>
+        <ns0:cNvGrpSpPr/>
+        <ns0:nvPr/>
+      </ns0:nvGrpSpPr>
+      <ns0:grpSpPr>
+        <ns1:xfrm>
+          <ns1:off x="0" y="0"/>
+          <ns1:ext cx="0" cy="0"/>
+          <ns1:chOff x="0" y="0"/>
+          <ns1:chExt cx="0" cy="0"/>
+        </ns1:xfrm>
+      </ns0:grpSpPr>
+      <ns0:pic>
+        <ns0:nvPicPr>
+          <ns0:cNvPr id="2" name="Image 0" descr="preencoded.png">    </ns0:cNvPr>
+          <ns0:cNvPicPr>
+            <ns1:picLocks noChangeAspect="1"/>
+          </ns0:cNvPicPr>
+          <ns0:nvPr/>
+        </ns0:nvPicPr>
+        <ns0:blipFill>
+          <ns1:blip ns2:embed="rId1"/>
+          <ns1:stretch>
+            <ns1:fillRect/>
+          </ns1:stretch>
+        </ns0:blipFill>
+        <ns0:spPr>
+          <ns1:xfrm>
+            <ns1:off x="4572000" y="365760"/>
+            <ns1:ext cx="7315200" cy="5029200"/>
+          </ns1:xfrm>
+          <ns1:prstGeom prst="rect">
+            <ns1:avLst/>
+          </ns1:prstGeom>
+        </ns0:spPr>
+      </ns0:pic>
+      <ns0:sp>
+        <ns0:nvSpPr>
+          <ns0:cNvPr id="3" name="Text 0"/>
+          <ns0:cNvSpPr/>
+          <ns0:nvPr/>
+        </ns0:nvSpPr>
+        <ns0:spPr>
+          <ns1:xfrm>
+            <ns1:off x="914400" y="4572000"/>
+            <ns1:ext cx="3657600" cy="274320"/>
+          </ns1:xfrm>
+          <ns1:prstGeom prst="rect">
+            <ns1:avLst/>
+          </ns1:prstGeom>
+          <ns1:noFill/>
+          <ns1:ln/>
+        </ns0:spPr>
+        <ns0:txBody>
+          <ns1:bodyPr wrap="square" lIns="0" tIns="0" rIns="0" bIns="0" rtlCol="0" anchor="b"/>
+          <ns1:lstStyle/>
+          <ns1:p>
+            <ns1:pPr indent="0" marL="0">
+              <ns1:buNone/>
+            </ns1:pPr>
+            <ns1:r>
+              <ns1:rPr lang="en-US" sz="1400" dirty="0">
+                <ns1:solidFill>
+                  <ns1:srgbClr val="141413"/>
+                </ns1:solidFill>
+                <ns1:latin typeface="Calibri" pitchFamily="34" charset="0"/>
+                <ns1:ea typeface="Calibri" pitchFamily="34" charset="-122"/>
+                <ns1:cs typeface="Calibri" pitchFamily="34" charset="-120"/>
+              </ns1:rPr>
+              <ns1:t>Chapter 3</ns1:t>
+            </ns1:r>
+            <ns1:endParaRPr lang="en-US" sz="1400" dirty="0"/>
+          </ns1:p>
+        </ns0:txBody>
+      </ns0:sp>
+      <ns0:sp>
+        <ns0:nvSpPr>
+          <ns0:cNvPr id="4" name="Text 1"/>
+          <ns0:cNvSpPr/>
+          <ns0:nvPr/>
+        </ns0:nvSpPr>
+        <ns0:spPr>
+          <ns1:xfrm>
+            <ns1:off x="914400" y="4846320"/>
+            <ns1:ext cx="8229600" cy="914400"/>
+          </ns1:xfrm>
+          <ns1:prstGeom prst="rect">
+            <ns1:avLst/>
+          </ns1:prstGeom>
+          <ns1:noFill/>
+          <ns1:ln/>
+        </ns0:spPr>
+        <ns0:txBody>
+          <ns1:bodyPr wrap="square" lIns="0" tIns="0" rIns="0" bIns="0" rtlCol="0" anchor="t"/>
+          <ns1:lstStyle/>
+          <ns1:p>
+            <ns1:pPr indent="0" marL="0">
+              <ns1:buNone/>
+            </ns1:pPr>
+            <ns1:r>
+              <ns1:rPr lang="en-US" sz="4000" dirty="0">
+                <ns1:solidFill>
+                  <ns1:srgbClr val="141413"/>
+                </ns1:solidFill>
+                <ns1:latin typeface="Georgia" pitchFamily="34" charset="0"/>
+                <ns1:ea typeface="Yu Mincho" pitchFamily="34" charset="-122"/>
+                <ns1:cs typeface="Georgia" pitchFamily="34" charset="-120"/>
+              </ns1:rPr>
+              <ns1:t>小さく試す</ns1:t>
+            </ns1:r>
+            <ns1:endParaRPr lang="en-US" sz="4000" dirty="0"/>
+          </ns1:p>
+        </ns0:txBody>
+      </ns0:sp>
+      <ns0:sp>
+        <ns0:nvSpPr>
+          <ns0:cNvPr id="5" name="Text 2"/>
+          <ns0:cNvSpPr/>
+          <ns0:nvPr/>
+        </ns0:nvSpPr>
+        <ns0:spPr>
+          <ns1:xfrm>
+            <ns1:off x="11247120" y="6400800"/>
+            <ns1:ext cx="457200" cy="228600"/>
+          </ns1:xfrm>
+          <ns1:prstGeom prst="rect">
+            <ns1:avLst/>
+          </ns1:prstGeom>
+          <ns1:noFill/>
+          <ns1:ln/>
+        </ns0:spPr>
+        <ns0:txBody>
+          <ns1:bodyPr wrap="square" lIns="0" tIns="0" rIns="0" bIns="0" rtlCol="0" anchor="b"/>
+          <ns1:lstStyle/>
+          <ns1:p>
+            <ns1:pPr algn="r" indent="0" marL="0">
+              <ns1:buNone/>
+            </ns1:pPr>
+            <ns1:r>
+              <ns1:rPr lang="en-US" sz="1400" dirty="0">
+                <ns1:solidFill>
+                  <ns1:srgbClr val="141413"/>
+                </ns1:solidFill>
+                <ns1:latin typeface="Calibri" pitchFamily="34" charset="0"/>
+                <ns1:ea typeface="Calibri" pitchFamily="34" charset="-122"/>
+                <ns1:cs typeface="Calibri" pitchFamily="34" charset="-120"/>
+              </ns1:rPr>
+              <ns1:t>4</ns1:t>
+            </ns1:r>
+            <ns1:endParaRPr lang="en-US" sz="1400" dirty="0"/>
+          </ns1:p>
+        </ns0:txBody>
+      </ns0:sp>
+    </ns0:spTree>
+  </ns0:cSld>
+  <ns0:clrMapOvr>
+    <ns1:masterClrMapping/>
+  </ns0:clrMapOvr>
+</ns0:sld>
 </file>
 
 <file path=ppt/slides/slide5.xml><?xml version="1.0" encoding="utf-8"?>
-<p:sld xmlns:a="http://schemas.openxmlformats.org/drawingml/2006/main" xmlns:r="http://schemas.openxmlformats.org/officeDocument/2006/relationships" xmlns:p="http://schemas.openxmlformats.org/presentationml/2006/main">
-  <p:cSld name="Slide 5">
-    <p:bg>
-      <p:bgPr>
-        <a:solidFill>
-          <a:srgbClr val="EFE6CE"/>
-        </a:solidFill>
-      </p:bgPr>
-    </p:bg>
-    <p:spTree>
-      <p:nvGrpSpPr>
-        <p:cNvPr id="1" name=""/>
-        <p:cNvGrpSpPr/>
-        <p:nvPr/>
-      </p:nvGrpSpPr>
-      <p:grpSpPr>
-        <a:xfrm>
-          <a:off x="0" y="0"/>
-          <a:ext cx="0" cy="0"/>
-          <a:chOff x="0" y="0"/>
-          <a:chExt cx="0" cy="0"/>
-        </a:xfrm>
-      </p:grpSpPr>
-      <p:pic>
-        <p:nvPicPr>
-          <p:cNvPr id="2" name="Image 0" descr="preencoded.png">    </p:cNvPr>
-          <p:cNvPicPr>
-            <a:picLocks noChangeAspect="1"/>
-          </p:cNvPicPr>
-          <p:nvPr/>
-        </p:nvPicPr>
-        <p:blipFill>
-          <a:blip r:embed="rId1"/>
-          <a:stretch>
-            <a:fillRect/>
-          </a:stretch>
-        </p:blipFill>
-        <p:spPr>
-          <a:xfrm>
-            <a:off x="228600" y="182880"/>
-            <a:ext cx="11722608" cy="6181344"/>
-          </a:xfrm>
-          <a:prstGeom prst="rect">
-            <a:avLst/>
-          </a:prstGeom>
-        </p:spPr>
-      </p:pic>
-      <p:pic>
-        <p:nvPicPr>
-          <p:cNvPr id="3" name="Image 1" descr="preencoded.png">    </p:cNvPr>
-          <p:cNvPicPr>
-            <a:picLocks noChangeAspect="1"/>
-          </p:cNvPicPr>
-          <p:nvPr/>
-        </p:nvPicPr>
-        <p:blipFill>
-          <a:blip r:embed="rId2"/>
-          <a:stretch>
-            <a:fillRect/>
-          </a:stretch>
-        </p:blipFill>
-        <p:spPr>
-          <a:xfrm>
-            <a:off x="4572000" y="365760"/>
-            <a:ext cx="7315200" cy="5029200"/>
-          </a:xfrm>
-          <a:prstGeom prst="rect">
-            <a:avLst/>
-          </a:prstGeom>
-        </p:spPr>
-      </p:pic>
-      <p:sp>
-        <p:nvSpPr>
-          <p:cNvPr id="4" name="Text 0"/>
-          <p:cNvSpPr/>
-          <p:nvPr/>
-        </p:nvSpPr>
-        <p:spPr>
-          <a:xfrm>
-            <a:off x="914400" y="4535424"/>
-            <a:ext cx="5943600" cy="274320"/>
-          </a:xfrm>
-          <a:prstGeom prst="rect">
-            <a:avLst/>
-          </a:prstGeom>
-          <a:noFill/>
-          <a:ln/>
-        </p:spPr>
-        <p:txBody>
-          <a:bodyPr wrap="square" lIns="0" tIns="0" rIns="0" bIns="0" rtlCol="0" anchor="b"/>
-          <a:lstStyle/>
-          <a:p>
-            <a:pPr indent="0" marL="0">
-              <a:buNone/>
-            </a:pPr>
-            <a:r>
-              <a:rPr lang="en-US" sz="1400" spc="150" kern="0" dirty="0">
-                <a:solidFill>
-                  <a:srgbClr val="141413"/>
-                </a:solidFill>
-                <a:latin typeface="Manrope" pitchFamily="34" charset="0"/>
-                <a:ea typeface="Manrope" pitchFamily="34" charset="-122"/>
-                <a:cs typeface="Manrope" pitchFamily="34" charset="-120"/>
-              </a:rPr>
-              <a:t>CHAPTER 04 / LEARN</a:t>
-            </a:r>
-            <a:endParaRPr lang="en-US" sz="1400" dirty="0"/>
-          </a:p>
-        </p:txBody>
-      </p:sp>
-      <p:sp>
-        <p:nvSpPr>
-          <p:cNvPr id="5" name="Text 1"/>
-          <p:cNvSpPr/>
-          <p:nvPr/>
-        </p:nvSpPr>
-        <p:spPr>
-          <a:xfrm>
-            <a:off x="914400" y="4846320"/>
-            <a:ext cx="8229600" cy="731520"/>
-          </a:xfrm>
-          <a:prstGeom prst="rect">
-            <a:avLst/>
-          </a:prstGeom>
-          <a:noFill/>
-          <a:ln/>
-        </p:spPr>
-        <p:txBody>
-          <a:bodyPr wrap="square" lIns="0" tIns="0" rIns="0" bIns="0" rtlCol="0" anchor="t"/>
-          <a:lstStyle/>
-          <a:p>
-            <a:pPr indent="0" marL="0">
-              <a:buNone/>
-            </a:pPr>
-            <a:r>
-              <a:rPr lang="en-US" sz="4400" b="1" dirty="0">
-                <a:solidFill>
-                  <a:srgbClr val="141413"/>
-                </a:solidFill>
-                <a:latin typeface="Zen Maru Gothic" pitchFamily="34" charset="0"/>
-                <a:ea typeface="Zen Maru Gothic" pitchFamily="34" charset="-122"/>
-                <a:cs typeface="Zen Maru Gothic" pitchFamily="34" charset="-120"/>
-              </a:rPr>
-              <a:t>振り返る。</a:t>
-            </a:r>
-            <a:endParaRPr lang="en-US" sz="4400" dirty="0"/>
-          </a:p>
-        </p:txBody>
-      </p:sp>
-      <p:sp>
-        <p:nvSpPr>
-          <p:cNvPr id="6" name="Text 2"/>
-          <p:cNvSpPr/>
-          <p:nvPr/>
-        </p:nvSpPr>
-        <p:spPr>
-          <a:xfrm>
-            <a:off x="932688" y="5724144"/>
-            <a:ext cx="9875520" cy="457200"/>
-          </a:xfrm>
-          <a:prstGeom prst="rect">
-            <a:avLst/>
-          </a:prstGeom>
-          <a:noFill/>
-          <a:ln/>
-        </p:spPr>
-        <p:txBody>
-          <a:bodyPr wrap="square" lIns="0" tIns="0" rIns="0" bIns="0" rtlCol="0" anchor="ctr"/>
-          <a:lstStyle/>
-          <a:p>
-            <a:pPr indent="0" marL="0">
-              <a:buNone/>
-            </a:pPr>
-            <a:r>
-              <a:rPr lang="en-US" sz="1800" dirty="0">
-                <a:solidFill>
-                  <a:srgbClr val="141413"/>
-                </a:solidFill>
-                <a:latin typeface="Zen Maru Gothic" pitchFamily="34" charset="0"/>
-                <a:ea typeface="Zen Maru Gothic" pitchFamily="34" charset="-122"/>
-                <a:cs typeface="Zen Maru Gothic" pitchFamily="34" charset="-120"/>
-              </a:rPr>
-              <a:t>うまくいったことも、迷ったことも、次の種に。</a:t>
-            </a:r>
-            <a:endParaRPr lang="en-US" sz="1800" dirty="0"/>
-          </a:p>
-        </p:txBody>
-      </p:sp>
-      <p:sp>
-        <p:nvSpPr>
-          <p:cNvPr id="7" name="Text 3"/>
-          <p:cNvSpPr/>
-          <p:nvPr/>
-        </p:nvSpPr>
-        <p:spPr>
-          <a:xfrm>
-            <a:off x="10972800" y="6400800"/>
-            <a:ext cx="594360" cy="228600"/>
-          </a:xfrm>
-          <a:prstGeom prst="rect">
-            <a:avLst/>
-          </a:prstGeom>
-          <a:noFill/>
-          <a:ln/>
-        </p:spPr>
-        <p:txBody>
-          <a:bodyPr wrap="square" lIns="0" tIns="0" rIns="0" bIns="0" rtlCol="0" anchor="b"/>
-          <a:lstStyle/>
-          <a:p>
-            <a:pPr algn="r" indent="0" marL="0">
-              <a:buNone/>
-            </a:pPr>
-            <a:r>
-              <a:rPr lang="en-US" sz="1400" dirty="0">
-                <a:solidFill>
-                  <a:srgbClr val="141413"/>
-                </a:solidFill>
-                <a:latin typeface="Manrope" pitchFamily="34" charset="0"/>
-                <a:ea typeface="Manrope" pitchFamily="34" charset="-122"/>
-                <a:cs typeface="Manrope" pitchFamily="34" charset="-120"/>
-              </a:rPr>
-              <a:t>05</a:t>
-            </a:r>
-            <a:endParaRPr lang="en-US" sz="1400" dirty="0"/>
-          </a:p>
-        </p:txBody>
-      </p:sp>
-      <p:sp>
-        <p:nvSpPr>
-          <p:cNvPr id="8" name="Text 4"/>
-          <p:cNvSpPr/>
-          <p:nvPr/>
-        </p:nvSpPr>
-        <p:spPr>
-          <a:xfrm>
-            <a:off x="731520" y="6428232"/>
-            <a:ext cx="9601200" cy="201168"/>
-          </a:xfrm>
-          <a:prstGeom prst="rect">
-            <a:avLst/>
-          </a:prstGeom>
-          <a:noFill/>
-          <a:ln/>
-        </p:spPr>
-        <p:txBody>
-          <a:bodyPr wrap="square" lIns="0" tIns="0" rIns="0" bIns="0" rtlCol="0" anchor="ctr"/>
-          <a:lstStyle/>
-          <a:p>
-            <a:pPr indent="0" marL="0">
-              <a:buNone/>
-            </a:pPr>
-            <a:r>
-              <a:rPr lang="en-US" sz="900" dirty="0">
-                <a:solidFill>
-                  <a:srgbClr val="645D53"/>
-                </a:solidFill>
-                <a:latin typeface="Zen Maru Gothic" pitchFamily="34" charset="0"/>
-                <a:ea typeface="Zen Maru Gothic" pitchFamily="34" charset="-122"/>
-                <a:cs typeface="Zen Maru Gothic" pitchFamily="34" charset="-120"/>
-              </a:rPr>
-              <a:t>チームのアイデアを、育てる。 / 章扉サンプル</a:t>
-            </a:r>
-            <a:endParaRPr lang="en-US" sz="900" dirty="0"/>
-          </a:p>
-        </p:txBody>
-      </p:sp>
-    </p:spTree>
-  </p:cSld>
-  <p:clrMapOvr>
-    <a:masterClrMapping/>
-  </p:clrMapOvr>
-</p:sld>
+<ns0:sld xmlns:ns0="http://schemas.openxmlformats.org/presentationml/2006/main" xmlns:ns1="http://schemas.openxmlformats.org/drawingml/2006/main" xmlns:ns2="http://schemas.openxmlformats.org/officeDocument/2006/relationships">
+  <ns0:cSld name="Slide 5">
+    <ns0:bg>
+      <ns0:bgPr>
+        <ns1:solidFill>
+          <ns1:srgbClr val="C9A96E"/>
+        </ns1:solidFill>
+      </ns0:bgPr>
+    </ns0:bg>
+    <ns0:spTree>
+      <ns0:nvGrpSpPr>
+        <ns0:cNvPr id="1" name=""/>
+        <ns0:cNvGrpSpPr/>
+        <ns0:nvPr/>
+      </ns0:nvGrpSpPr>
+      <ns0:grpSpPr>
+        <ns1:xfrm>
+          <ns1:off x="0" y="0"/>
+          <ns1:ext cx="0" cy="0"/>
+          <ns1:chOff x="0" y="0"/>
+          <ns1:chExt cx="0" cy="0"/>
+        </ns1:xfrm>
+      </ns0:grpSpPr>
+      <ns0:pic>
+        <ns0:nvPicPr>
+          <ns0:cNvPr id="2" name="Image 0" descr="preencoded.png">    </ns0:cNvPr>
+          <ns0:cNvPicPr>
+            <ns1:picLocks noChangeAspect="1"/>
+          </ns0:cNvPicPr>
+          <ns0:nvPr/>
+        </ns0:nvPicPr>
+        <ns0:blipFill>
+          <ns1:blip ns2:embed="rId1"/>
+          <ns1:stretch>
+            <ns1:fillRect/>
+          </ns1:stretch>
+        </ns0:blipFill>
+        <ns0:spPr>
+          <ns1:xfrm>
+            <ns1:off x="4572000" y="365760"/>
+            <ns1:ext cx="7315200" cy="5029200"/>
+          </ns1:xfrm>
+          <ns1:prstGeom prst="rect">
+            <ns1:avLst/>
+          </ns1:prstGeom>
+        </ns0:spPr>
+      </ns0:pic>
+      <ns0:sp>
+        <ns0:nvSpPr>
+          <ns0:cNvPr id="3" name="Text 0"/>
+          <ns0:cNvSpPr/>
+          <ns0:nvPr/>
+        </ns0:nvSpPr>
+        <ns0:spPr>
+          <ns1:xfrm>
+            <ns1:off x="914400" y="4572000"/>
+            <ns1:ext cx="3657600" cy="274320"/>
+          </ns1:xfrm>
+          <ns1:prstGeom prst="rect">
+            <ns1:avLst/>
+          </ns1:prstGeom>
+          <ns1:noFill/>
+          <ns1:ln/>
+        </ns0:spPr>
+        <ns0:txBody>
+          <ns1:bodyPr wrap="square" lIns="0" tIns="0" rIns="0" bIns="0" rtlCol="0" anchor="b"/>
+          <ns1:lstStyle/>
+          <ns1:p>
+            <ns1:pPr indent="0" marL="0">
+              <ns1:buNone/>
+            </ns1:pPr>
+            <ns1:r>
+              <ns1:rPr lang="en-US" sz="1400" dirty="0">
+                <ns1:solidFill>
+                  <ns1:srgbClr val="141413"/>
+                </ns1:solidFill>
+                <ns1:latin typeface="Calibri" pitchFamily="34" charset="0"/>
+                <ns1:ea typeface="Calibri" pitchFamily="34" charset="-122"/>
+                <ns1:cs typeface="Calibri" pitchFamily="34" charset="-120"/>
+              </ns1:rPr>
+              <ns1:t>Chapter 4</ns1:t>
+            </ns1:r>
+            <ns1:endParaRPr lang="en-US" sz="1400" dirty="0"/>
+          </ns1:p>
+        </ns0:txBody>
+      </ns0:sp>
+      <ns0:sp>
+        <ns0:nvSpPr>
+          <ns0:cNvPr id="4" name="Text 1"/>
+          <ns0:cNvSpPr/>
+          <ns0:nvPr/>
+        </ns0:nvSpPr>
+        <ns0:spPr>
+          <ns1:xfrm>
+            <ns1:off x="914400" y="4846320"/>
+            <ns1:ext cx="8229600" cy="914400"/>
+          </ns1:xfrm>
+          <ns1:prstGeom prst="rect">
+            <ns1:avLst/>
+          </ns1:prstGeom>
+          <ns1:noFill/>
+          <ns1:ln/>
+        </ns0:spPr>
+        <ns0:txBody>
+          <ns1:bodyPr wrap="square" lIns="0" tIns="0" rIns="0" bIns="0" rtlCol="0" anchor="t"/>
+          <ns1:lstStyle/>
+          <ns1:p>
+            <ns1:pPr indent="0" marL="0">
+              <ns1:buNone/>
+            </ns1:pPr>
+            <ns1:r>
+              <ns1:rPr lang="en-US" sz="4000" dirty="0">
+                <ns1:solidFill>
+                  <ns1:srgbClr val="141413"/>
+                </ns1:solidFill>
+                <ns1:latin typeface="Georgia" pitchFamily="34" charset="0"/>
+                <ns1:ea typeface="Yu Mincho" pitchFamily="34" charset="-122"/>
+                <ns1:cs typeface="Georgia" pitchFamily="34" charset="-120"/>
+              </ns1:rPr>
+              <ns1:t>結果を記録する</ns1:t>
+            </ns1:r>
+            <ns1:endParaRPr lang="en-US" sz="4000" dirty="0"/>
+          </ns1:p>
+        </ns0:txBody>
+      </ns0:sp>
+      <ns0:sp>
+        <ns0:nvSpPr>
+          <ns0:cNvPr id="5" name="Text 2"/>
+          <ns0:cNvSpPr/>
+          <ns0:nvPr/>
+        </ns0:nvSpPr>
+        <ns0:spPr>
+          <ns1:xfrm>
+            <ns1:off x="11247120" y="6400800"/>
+            <ns1:ext cx="457200" cy="228600"/>
+          </ns1:xfrm>
+          <ns1:prstGeom prst="rect">
+            <ns1:avLst/>
+          </ns1:prstGeom>
+          <ns1:noFill/>
+          <ns1:ln/>
+        </ns0:spPr>
+        <ns0:txBody>
+          <ns1:bodyPr wrap="square" lIns="0" tIns="0" rIns="0" bIns="0" rtlCol="0" anchor="b"/>
+          <ns1:lstStyle/>
+          <ns1:p>
+            <ns1:pPr algn="r" indent="0" marL="0">
+              <ns1:buNone/>
+            </ns1:pPr>
+            <ns1:r>
+              <ns1:rPr lang="en-US" sz="1400" dirty="0">
+                <ns1:solidFill>
+                  <ns1:srgbClr val="141413"/>
+                </ns1:solidFill>
+                <ns1:latin typeface="Calibri" pitchFamily="34" charset="0"/>
+                <ns1:ea typeface="Calibri" pitchFamily="34" charset="-122"/>
+                <ns1:cs typeface="Calibri" pitchFamily="34" charset="-120"/>
+              </ns1:rPr>
+              <ns1:t>5</ns1:t>
+            </ns1:r>
+            <ns1:endParaRPr lang="en-US" sz="1400" dirty="0"/>
+          </ns1:p>
+        </ns0:txBody>
+      </ns0:sp>
+    </ns0:spTree>
+  </ns0:cSld>
+  <ns0:clrMapOvr>
+    <ns1:masterClrMapping/>
+  </ns0:clrMapOvr>
+</ns0:sld>
 </file>
 
 <file path=ppt/theme/theme1.xml><?xml version="1.0" encoding="utf-8"?>
